--- a/AgenticAI/6-hands-on/Simple_Agent_to_talk_with_SQL/part2_intermediate_level/Notes.pptx
+++ b/AgenticAI/6-hands-on/Simple_Agent_to_talk_with_SQL/part2_intermediate_level/Notes.pptx
@@ -221,7 +221,7 @@
           <a:p>
             <a:fld id="{7BAEECA8-D063-486F-AE31-5020270C1449}" type="datetimeFigureOut">
               <a:rPr lang="en-US" smtClean="0"/>
-              <a:t>5/28/2026</a:t>
+              <a:t>6/30/2026</a:t>
             </a:fld>
             <a:endParaRPr lang="en-US"/>
           </a:p>
@@ -510,7 +510,7 @@
           <a:p>
             <a:fld id="{E0F4871E-3672-42BE-BBA1-0BAFEE555536}" type="datetimeFigureOut">
               <a:rPr lang="en-US" smtClean="0"/>
-              <a:t>5/28/2026</a:t>
+              <a:t>6/30/2026</a:t>
             </a:fld>
             <a:endParaRPr lang="en-US"/>
           </a:p>
@@ -924,7 +924,7 @@
           <a:p>
             <a:fld id="{6383FAE1-13DE-4511-8C1B-C8AFB720664C}" type="datetimeFigureOut">
               <a:rPr lang="en-US" smtClean="0"/>
-              <a:t>5/28/2026</a:t>
+              <a:t>6/30/2026</a:t>
             </a:fld>
             <a:endParaRPr lang="en-US"/>
           </a:p>
@@ -1122,7 +1122,7 @@
           <a:p>
             <a:fld id="{6383FAE1-13DE-4511-8C1B-C8AFB720664C}" type="datetimeFigureOut">
               <a:rPr lang="en-US" smtClean="0"/>
-              <a:t>5/28/2026</a:t>
+              <a:t>6/30/2026</a:t>
             </a:fld>
             <a:endParaRPr lang="en-US"/>
           </a:p>
@@ -1330,7 +1330,7 @@
           <a:p>
             <a:fld id="{6383FAE1-13DE-4511-8C1B-C8AFB720664C}" type="datetimeFigureOut">
               <a:rPr lang="en-US" smtClean="0"/>
-              <a:t>5/28/2026</a:t>
+              <a:t>6/30/2026</a:t>
             </a:fld>
             <a:endParaRPr lang="en-US"/>
           </a:p>
@@ -1528,7 +1528,7 @@
           <a:p>
             <a:fld id="{6383FAE1-13DE-4511-8C1B-C8AFB720664C}" type="datetimeFigureOut">
               <a:rPr lang="en-US" smtClean="0"/>
-              <a:t>5/28/2026</a:t>
+              <a:t>6/30/2026</a:t>
             </a:fld>
             <a:endParaRPr lang="en-US"/>
           </a:p>
@@ -1803,7 +1803,7 @@
           <a:p>
             <a:fld id="{6383FAE1-13DE-4511-8C1B-C8AFB720664C}" type="datetimeFigureOut">
               <a:rPr lang="en-US" smtClean="0"/>
-              <a:t>5/28/2026</a:t>
+              <a:t>6/30/2026</a:t>
             </a:fld>
             <a:endParaRPr lang="en-US"/>
           </a:p>
@@ -2068,7 +2068,7 @@
           <a:p>
             <a:fld id="{6383FAE1-13DE-4511-8C1B-C8AFB720664C}" type="datetimeFigureOut">
               <a:rPr lang="en-US" smtClean="0"/>
-              <a:t>5/28/2026</a:t>
+              <a:t>6/30/2026</a:t>
             </a:fld>
             <a:endParaRPr lang="en-US"/>
           </a:p>
@@ -2480,7 +2480,7 @@
           <a:p>
             <a:fld id="{6383FAE1-13DE-4511-8C1B-C8AFB720664C}" type="datetimeFigureOut">
               <a:rPr lang="en-US" smtClean="0"/>
-              <a:t>5/28/2026</a:t>
+              <a:t>6/30/2026</a:t>
             </a:fld>
             <a:endParaRPr lang="en-US"/>
           </a:p>
@@ -2621,7 +2621,7 @@
           <a:p>
             <a:fld id="{6383FAE1-13DE-4511-8C1B-C8AFB720664C}" type="datetimeFigureOut">
               <a:rPr lang="en-US" smtClean="0"/>
-              <a:t>5/28/2026</a:t>
+              <a:t>6/30/2026</a:t>
             </a:fld>
             <a:endParaRPr lang="en-US"/>
           </a:p>
@@ -2734,7 +2734,7 @@
           <a:p>
             <a:fld id="{6383FAE1-13DE-4511-8C1B-C8AFB720664C}" type="datetimeFigureOut">
               <a:rPr lang="en-US" smtClean="0"/>
-              <a:t>5/28/2026</a:t>
+              <a:t>6/30/2026</a:t>
             </a:fld>
             <a:endParaRPr lang="en-US"/>
           </a:p>
@@ -3045,7 +3045,7 @@
           <a:p>
             <a:fld id="{6383FAE1-13DE-4511-8C1B-C8AFB720664C}" type="datetimeFigureOut">
               <a:rPr lang="en-US" smtClean="0"/>
-              <a:t>5/28/2026</a:t>
+              <a:t>6/30/2026</a:t>
             </a:fld>
             <a:endParaRPr lang="en-US"/>
           </a:p>
@@ -3336,7 +3336,7 @@
           <a:p>
             <a:fld id="{6383FAE1-13DE-4511-8C1B-C8AFB720664C}" type="datetimeFigureOut">
               <a:rPr lang="en-US" smtClean="0"/>
-              <a:t>5/28/2026</a:t>
+              <a:t>6/30/2026</a:t>
             </a:fld>
             <a:endParaRPr lang="en-US"/>
           </a:p>
@@ -3580,7 +3580,7 @@
           <a:p>
             <a:fld id="{6383FAE1-13DE-4511-8C1B-C8AFB720664C}" type="datetimeFigureOut">
               <a:rPr lang="en-US" smtClean="0"/>
-              <a:t>5/28/2026</a:t>
+              <a:t>6/30/2026</a:t>
             </a:fld>
             <a:endParaRPr lang="en-US"/>
           </a:p>
@@ -4926,8 +4926,8 @@
         </p:blipFill>
         <p:spPr>
           <a:xfrm>
-            <a:off x="2761606" y="166896"/>
-            <a:ext cx="7490150" cy="6524208"/>
+            <a:off x="2570000" y="0"/>
+            <a:ext cx="7681756" cy="6691104"/>
           </a:xfrm>
           <a:prstGeom prst="rect">
             <a:avLst/>
